--- a/assets/credits-notifier-architecture.pptx
+++ b/assets/credits-notifier-architecture.pptx
@@ -503,6 +503,13 @@
           </p:nvPr>
         </p:nvSpPr>
         <p:spPr/>
+        <p:txBody>
+          <a:bodyPr/>
+          <a:lstStyle/>
+          <a:p>
+            <a:endParaRPr lang="en-US"/>
+          </a:p>
+        </p:txBody>
       </p:sp>
       <p:sp>
         <p:nvSpPr>
@@ -4933,7 +4940,7 @@
           <a:p>
             <a:pPr algn="ctr"/>
             <a:r>
-              <a:rPr sz="900" b="0" i="0" dirty="0" err="1">
+              <a:rPr sz="900" b="0" i="0" dirty="0">
                 <a:solidFill>
                   <a:srgbClr val="232F3E"/>
                 </a:solidFill>
@@ -4941,12 +4948,6 @@
               </a:rPr>
               <a:t>billing:GetCredits</a:t>
             </a:r>
-            <a:endParaRPr sz="900" b="0" i="0" dirty="0">
-              <a:solidFill>
-                <a:srgbClr val="232F3E"/>
-              </a:solidFill>
-              <a:latin typeface="Arial"/>
-            </a:endParaRPr>
           </a:p>
         </p:txBody>
       </p:sp>
